--- a/assets/powerpoints/module-urgence/A4-la-trousse-de-premiers-soins.pptx
+++ b/assets/powerpoints/module-urgence/A4-la-trousse-de-premiers-soins.pptx
@@ -4574,7 +4574,7 @@
             <a:r>
               <a:rPr sz="1300" b="1" i="0" spc="156">
                 <a:solidFill>
-                  <a:srgbClr val="166534"/>
+                  <a:srgbClr val="A5335F"/>
                 </a:solidFill>
                 <a:latin typeface="Verdana"/>
               </a:rPr>
@@ -4914,7 +4914,7 @@
             <a:r>
               <a:rPr sz="1300" b="1" i="0" spc="156">
                 <a:solidFill>
-                  <a:srgbClr val="166534"/>
+                  <a:srgbClr val="A5335F"/>
                 </a:solidFill>
                 <a:latin typeface="Verdana"/>
               </a:rPr>
@@ -5064,7 +5064,7 @@
             </a:avLst>
           </a:prstGeom>
           <a:solidFill>
-            <a:srgbClr val="E3F1E7"/>
+            <a:srgbClr val="FCE9F0"/>
           </a:solidFill>
           <a:ln>
             <a:noFill/>
@@ -5121,7 +5121,7 @@
             <a:r>
               <a:rPr sz="1500" b="1" i="0">
                 <a:solidFill>
-                  <a:srgbClr val="166534"/>
+                  <a:srgbClr val="A5335F"/>
                 </a:solidFill>
                 <a:latin typeface="Verdana"/>
               </a:rPr>
@@ -5232,7 +5232,7 @@
             </a:avLst>
           </a:prstGeom>
           <a:solidFill>
-            <a:srgbClr val="E3F1E7"/>
+            <a:srgbClr val="FCE9F0"/>
           </a:solidFill>
           <a:ln>
             <a:noFill/>
@@ -5289,7 +5289,7 @@
             <a:r>
               <a:rPr sz="1500" b="1" i="0">
                 <a:solidFill>
-                  <a:srgbClr val="166534"/>
+                  <a:srgbClr val="A5335F"/>
                 </a:solidFill>
                 <a:latin typeface="Verdana"/>
               </a:rPr>
@@ -5400,7 +5400,7 @@
             </a:avLst>
           </a:prstGeom>
           <a:solidFill>
-            <a:srgbClr val="E3F1E7"/>
+            <a:srgbClr val="FCE9F0"/>
           </a:solidFill>
           <a:ln>
             <a:noFill/>
@@ -5457,7 +5457,7 @@
             <a:r>
               <a:rPr sz="1500" b="1" i="0">
                 <a:solidFill>
-                  <a:srgbClr val="166534"/>
+                  <a:srgbClr val="A5335F"/>
                 </a:solidFill>
                 <a:latin typeface="Verdana"/>
               </a:rPr>
@@ -5568,7 +5568,7 @@
             </a:avLst>
           </a:prstGeom>
           <a:solidFill>
-            <a:srgbClr val="E3F1E7"/>
+            <a:srgbClr val="FCE9F0"/>
           </a:solidFill>
           <a:ln>
             <a:noFill/>
@@ -5625,7 +5625,7 @@
             <a:r>
               <a:rPr sz="1500" b="1" i="0">
                 <a:solidFill>
-                  <a:srgbClr val="166534"/>
+                  <a:srgbClr val="A5335F"/>
                 </a:solidFill>
                 <a:latin typeface="Verdana"/>
               </a:rPr>
@@ -5736,7 +5736,7 @@
             </a:avLst>
           </a:prstGeom>
           <a:solidFill>
-            <a:srgbClr val="E3F1E7"/>
+            <a:srgbClr val="FCE9F0"/>
           </a:solidFill>
           <a:ln>
             <a:noFill/>
@@ -5793,7 +5793,7 @@
             <a:r>
               <a:rPr sz="1500" b="1" i="0">
                 <a:solidFill>
-                  <a:srgbClr val="166534"/>
+                  <a:srgbClr val="A5335F"/>
                 </a:solidFill>
                 <a:latin typeface="Verdana"/>
               </a:rPr>
@@ -5904,7 +5904,7 @@
             </a:avLst>
           </a:prstGeom>
           <a:solidFill>
-            <a:srgbClr val="E3F1E7"/>
+            <a:srgbClr val="FCE9F0"/>
           </a:solidFill>
           <a:ln>
             <a:noFill/>
@@ -5961,7 +5961,7 @@
             <a:r>
               <a:rPr sz="1500" b="1" i="0">
                 <a:solidFill>
-                  <a:srgbClr val="166534"/>
+                  <a:srgbClr val="A5335F"/>
                 </a:solidFill>
                 <a:latin typeface="Verdana"/>
               </a:rPr>
@@ -6177,7 +6177,7 @@
             <a:r>
               <a:rPr sz="1300" b="1" i="0" spc="156">
                 <a:solidFill>
-                  <a:srgbClr val="166534"/>
+                  <a:srgbClr val="A5335F"/>
                 </a:solidFill>
                 <a:latin typeface="Verdana"/>
               </a:rPr>
@@ -6327,7 +6327,7 @@
             </a:avLst>
           </a:prstGeom>
           <a:solidFill>
-            <a:srgbClr val="E3F1E7"/>
+            <a:srgbClr val="FCE9F0"/>
           </a:solidFill>
           <a:ln>
             <a:noFill/>
@@ -6384,7 +6384,7 @@
             <a:r>
               <a:rPr sz="1500" b="1" i="0">
                 <a:solidFill>
-                  <a:srgbClr val="166534"/>
+                  <a:srgbClr val="A5335F"/>
                 </a:solidFill>
                 <a:latin typeface="Verdana"/>
               </a:rPr>
@@ -6504,7 +6504,7 @@
             </a:avLst>
           </a:prstGeom>
           <a:solidFill>
-            <a:srgbClr val="E3F1E7"/>
+            <a:srgbClr val="FCE9F0"/>
           </a:solidFill>
           <a:ln>
             <a:noFill/>
@@ -6561,7 +6561,7 @@
             <a:r>
               <a:rPr sz="1500" b="1" i="0">
                 <a:solidFill>
-                  <a:srgbClr val="166534"/>
+                  <a:srgbClr val="A5335F"/>
                 </a:solidFill>
                 <a:latin typeface="Verdana"/>
               </a:rPr>
@@ -6681,7 +6681,7 @@
             </a:avLst>
           </a:prstGeom>
           <a:solidFill>
-            <a:srgbClr val="E3F1E7"/>
+            <a:srgbClr val="FCE9F0"/>
           </a:solidFill>
           <a:ln>
             <a:noFill/>
@@ -6738,7 +6738,7 @@
             <a:r>
               <a:rPr sz="1500" b="1" i="0">
                 <a:solidFill>
-                  <a:srgbClr val="166534"/>
+                  <a:srgbClr val="A5335F"/>
                 </a:solidFill>
                 <a:latin typeface="Verdana"/>
               </a:rPr>
@@ -6858,7 +6858,7 @@
             </a:avLst>
           </a:prstGeom>
           <a:solidFill>
-            <a:srgbClr val="E3F1E7"/>
+            <a:srgbClr val="FCE9F0"/>
           </a:solidFill>
           <a:ln>
             <a:noFill/>
@@ -6915,7 +6915,7 @@
             <a:r>
               <a:rPr sz="1500" b="1" i="0">
                 <a:solidFill>
-                  <a:srgbClr val="166534"/>
+                  <a:srgbClr val="A5335F"/>
                 </a:solidFill>
                 <a:latin typeface="Verdana"/>
               </a:rPr>
@@ -7035,7 +7035,7 @@
             </a:avLst>
           </a:prstGeom>
           <a:solidFill>
-            <a:srgbClr val="E3F1E7"/>
+            <a:srgbClr val="FCE9F0"/>
           </a:solidFill>
           <a:ln>
             <a:noFill/>
@@ -7092,7 +7092,7 @@
             <a:r>
               <a:rPr sz="1500" b="1" i="0">
                 <a:solidFill>
-                  <a:srgbClr val="166534"/>
+                  <a:srgbClr val="A5335F"/>
                 </a:solidFill>
                 <a:latin typeface="Verdana"/>
               </a:rPr>
@@ -7212,7 +7212,7 @@
             </a:avLst>
           </a:prstGeom>
           <a:solidFill>
-            <a:srgbClr val="E3F1E7"/>
+            <a:srgbClr val="FCE9F0"/>
           </a:solidFill>
           <a:ln>
             <a:noFill/>
@@ -7269,7 +7269,7 @@
             <a:r>
               <a:rPr sz="1500" b="1" i="0">
                 <a:solidFill>
-                  <a:srgbClr val="166534"/>
+                  <a:srgbClr val="A5335F"/>
                 </a:solidFill>
                 <a:latin typeface="Verdana"/>
               </a:rPr>
@@ -7494,7 +7494,7 @@
             <a:r>
               <a:rPr sz="1300" b="1" i="0" spc="156">
                 <a:solidFill>
-                  <a:srgbClr val="166534"/>
+                  <a:srgbClr val="A5335F"/>
                 </a:solidFill>
                 <a:latin typeface="Verdana"/>
               </a:rPr>
@@ -8043,7 +8043,7 @@
             <a:r>
               <a:rPr sz="1300" b="1" i="0" spc="156">
                 <a:solidFill>
-                  <a:srgbClr val="166534"/>
+                  <a:srgbClr val="A5335F"/>
                 </a:solidFill>
                 <a:latin typeface="Verdana"/>
               </a:rPr>
@@ -8193,7 +8193,7 @@
             </a:avLst>
           </a:prstGeom>
           <a:solidFill>
-            <a:srgbClr val="E3F1E7"/>
+            <a:srgbClr val="FCE9F0"/>
           </a:solidFill>
           <a:ln>
             <a:noFill/>
@@ -8250,7 +8250,7 @@
             <a:r>
               <a:rPr sz="1500" b="1" i="0">
                 <a:solidFill>
-                  <a:srgbClr val="166534"/>
+                  <a:srgbClr val="A5335F"/>
                 </a:solidFill>
                 <a:latin typeface="Verdana"/>
               </a:rPr>
@@ -8361,7 +8361,7 @@
             </a:avLst>
           </a:prstGeom>
           <a:solidFill>
-            <a:srgbClr val="E3F1E7"/>
+            <a:srgbClr val="FCE9F0"/>
           </a:solidFill>
           <a:ln>
             <a:noFill/>
@@ -8418,7 +8418,7 @@
             <a:r>
               <a:rPr sz="1500" b="1" i="0">
                 <a:solidFill>
-                  <a:srgbClr val="166534"/>
+                  <a:srgbClr val="A5335F"/>
                 </a:solidFill>
                 <a:latin typeface="Verdana"/>
               </a:rPr>
@@ -8529,7 +8529,7 @@
             </a:avLst>
           </a:prstGeom>
           <a:solidFill>
-            <a:srgbClr val="E3F1E7"/>
+            <a:srgbClr val="FCE9F0"/>
           </a:solidFill>
           <a:ln>
             <a:noFill/>
@@ -8586,7 +8586,7 @@
             <a:r>
               <a:rPr sz="1500" b="1" i="0">
                 <a:solidFill>
-                  <a:srgbClr val="166534"/>
+                  <a:srgbClr val="A5335F"/>
                 </a:solidFill>
                 <a:latin typeface="Verdana"/>
               </a:rPr>
@@ -8697,7 +8697,7 @@
             </a:avLst>
           </a:prstGeom>
           <a:solidFill>
-            <a:srgbClr val="E3F1E7"/>
+            <a:srgbClr val="FCE9F0"/>
           </a:solidFill>
           <a:ln>
             <a:noFill/>
@@ -8754,7 +8754,7 @@
             <a:r>
               <a:rPr sz="1500" b="1" i="0">
                 <a:solidFill>
-                  <a:srgbClr val="166534"/>
+                  <a:srgbClr val="A5335F"/>
                 </a:solidFill>
                 <a:latin typeface="Verdana"/>
               </a:rPr>
@@ -8970,7 +8970,7 @@
             <a:r>
               <a:rPr sz="1300" b="1" i="0" spc="156">
                 <a:solidFill>
-                  <a:srgbClr val="166534"/>
+                  <a:srgbClr val="A5335F"/>
                 </a:solidFill>
                 <a:latin typeface="Verdana"/>
               </a:rPr>
@@ -9120,7 +9120,7 @@
             </a:avLst>
           </a:prstGeom>
           <a:solidFill>
-            <a:srgbClr val="E3F1E7"/>
+            <a:srgbClr val="FCE9F0"/>
           </a:solidFill>
           <a:ln>
             <a:noFill/>
@@ -9177,7 +9177,7 @@
             <a:r>
               <a:rPr sz="1500" b="1" i="0">
                 <a:solidFill>
-                  <a:srgbClr val="166534"/>
+                  <a:srgbClr val="A5335F"/>
                 </a:solidFill>
                 <a:latin typeface="Verdana"/>
               </a:rPr>
@@ -9297,7 +9297,7 @@
             </a:avLst>
           </a:prstGeom>
           <a:solidFill>
-            <a:srgbClr val="E3F1E7"/>
+            <a:srgbClr val="FCE9F0"/>
           </a:solidFill>
           <a:ln>
             <a:noFill/>
@@ -9354,7 +9354,7 @@
             <a:r>
               <a:rPr sz="1500" b="1" i="0">
                 <a:solidFill>
-                  <a:srgbClr val="166534"/>
+                  <a:srgbClr val="A5335F"/>
                 </a:solidFill>
                 <a:latin typeface="Verdana"/>
               </a:rPr>
@@ -9474,7 +9474,7 @@
             </a:avLst>
           </a:prstGeom>
           <a:solidFill>
-            <a:srgbClr val="E3F1E7"/>
+            <a:srgbClr val="FCE9F0"/>
           </a:solidFill>
           <a:ln>
             <a:noFill/>
@@ -9531,7 +9531,7 @@
             <a:r>
               <a:rPr sz="1500" b="1" i="0">
                 <a:solidFill>
-                  <a:srgbClr val="166534"/>
+                  <a:srgbClr val="A5335F"/>
                 </a:solidFill>
                 <a:latin typeface="Verdana"/>
               </a:rPr>
@@ -9651,7 +9651,7 @@
             </a:avLst>
           </a:prstGeom>
           <a:solidFill>
-            <a:srgbClr val="E3F1E7"/>
+            <a:srgbClr val="FCE9F0"/>
           </a:solidFill>
           <a:ln>
             <a:noFill/>
@@ -9708,7 +9708,7 @@
             <a:r>
               <a:rPr sz="1500" b="1" i="0">
                 <a:solidFill>
-                  <a:srgbClr val="166534"/>
+                  <a:srgbClr val="A5335F"/>
                 </a:solidFill>
                 <a:latin typeface="Verdana"/>
               </a:rPr>
@@ -10396,7 +10396,7 @@
             <a:r>
               <a:rPr sz="1300" b="1" i="0" spc="156">
                 <a:solidFill>
-                  <a:srgbClr val="166534"/>
+                  <a:srgbClr val="A5335F"/>
                 </a:solidFill>
                 <a:latin typeface="Verdana"/>
               </a:rPr>
@@ -10507,7 +10507,7 @@
             </a:avLst>
           </a:prstGeom>
           <a:solidFill>
-            <a:srgbClr val="E3F1E7"/>
+            <a:srgbClr val="FCE9F0"/>
           </a:solidFill>
           <a:ln>
             <a:noFill/>
@@ -10564,7 +10564,7 @@
             <a:r>
               <a:rPr sz="1500" b="1" i="0">
                 <a:solidFill>
-                  <a:srgbClr val="166534"/>
+                  <a:srgbClr val="A5335F"/>
                 </a:solidFill>
                 <a:latin typeface="Verdana"/>
               </a:rPr>
@@ -10675,7 +10675,7 @@
             </a:avLst>
           </a:prstGeom>
           <a:solidFill>
-            <a:srgbClr val="E3F1E7"/>
+            <a:srgbClr val="FCE9F0"/>
           </a:solidFill>
           <a:ln>
             <a:noFill/>
@@ -10732,7 +10732,7 @@
             <a:r>
               <a:rPr sz="1500" b="1" i="0">
                 <a:solidFill>
-                  <a:srgbClr val="166534"/>
+                  <a:srgbClr val="A5335F"/>
                 </a:solidFill>
                 <a:latin typeface="Verdana"/>
               </a:rPr>
@@ -10843,7 +10843,7 @@
             </a:avLst>
           </a:prstGeom>
           <a:solidFill>
-            <a:srgbClr val="E3F1E7"/>
+            <a:srgbClr val="FCE9F0"/>
           </a:solidFill>
           <a:ln>
             <a:noFill/>
@@ -10900,7 +10900,7 @@
             <a:r>
               <a:rPr sz="1500" b="1" i="0">
                 <a:solidFill>
-                  <a:srgbClr val="166534"/>
+                  <a:srgbClr val="A5335F"/>
                 </a:solidFill>
                 <a:latin typeface="Verdana"/>
               </a:rPr>
@@ -11011,7 +11011,7 @@
             </a:avLst>
           </a:prstGeom>
           <a:solidFill>
-            <a:srgbClr val="E3F1E7"/>
+            <a:srgbClr val="FCE9F0"/>
           </a:solidFill>
           <a:ln>
             <a:noFill/>
@@ -11068,7 +11068,7 @@
             <a:r>
               <a:rPr sz="1500" b="1" i="0">
                 <a:solidFill>
-                  <a:srgbClr val="166534"/>
+                  <a:srgbClr val="A5335F"/>
                 </a:solidFill>
                 <a:latin typeface="Verdana"/>
               </a:rPr>
@@ -11284,7 +11284,7 @@
             <a:r>
               <a:rPr sz="1300" b="1" i="0" spc="156">
                 <a:solidFill>
-                  <a:srgbClr val="166534"/>
+                  <a:srgbClr val="A5335F"/>
                 </a:solidFill>
                 <a:latin typeface="Verdana"/>
               </a:rPr>
@@ -11486,7 +11486,7 @@
             <a:r>
               <a:rPr sz="1800" b="1" i="0">
                 <a:solidFill>
-                  <a:srgbClr val="166534"/>
+                  <a:srgbClr val="A5335F"/>
                 </a:solidFill>
                 <a:latin typeface="Verdana"/>
               </a:rPr>
@@ -11606,7 +11606,7 @@
             <a:r>
               <a:rPr sz="1800" b="1" i="0">
                 <a:solidFill>
-                  <a:srgbClr val="166534"/>
+                  <a:srgbClr val="A5335F"/>
                 </a:solidFill>
                 <a:latin typeface="Verdana"/>
               </a:rPr>
@@ -11726,7 +11726,7 @@
             <a:r>
               <a:rPr sz="1800" b="1" i="0">
                 <a:solidFill>
-                  <a:srgbClr val="166534"/>
+                  <a:srgbClr val="A5335F"/>
                 </a:solidFill>
                 <a:latin typeface="Verdana"/>
               </a:rPr>
@@ -11846,7 +11846,7 @@
             <a:r>
               <a:rPr sz="1800" b="1" i="0">
                 <a:solidFill>
-                  <a:srgbClr val="166534"/>
+                  <a:srgbClr val="A5335F"/>
                 </a:solidFill>
                 <a:latin typeface="Verdana"/>
               </a:rPr>
@@ -11966,7 +11966,7 @@
             <a:r>
               <a:rPr sz="1800" b="1" i="0">
                 <a:solidFill>
-                  <a:srgbClr val="166534"/>
+                  <a:srgbClr val="A5335F"/>
                 </a:solidFill>
                 <a:latin typeface="Verdana"/>
               </a:rPr>
@@ -12086,7 +12086,7 @@
             <a:r>
               <a:rPr sz="1800" b="1" i="0">
                 <a:solidFill>
-                  <a:srgbClr val="166534"/>
+                  <a:srgbClr val="A5335F"/>
                 </a:solidFill>
                 <a:latin typeface="Verdana"/>
               </a:rPr>
@@ -12302,7 +12302,7 @@
             <a:r>
               <a:rPr sz="1300" b="1" i="0" spc="156">
                 <a:solidFill>
-                  <a:srgbClr val="166534"/>
+                  <a:srgbClr val="A5335F"/>
                 </a:solidFill>
                 <a:latin typeface="Verdana"/>
               </a:rPr>
@@ -12426,7 +12426,7 @@
             <a:r>
               <a:rPr sz="2100" b="1" i="0">
                 <a:solidFill>
-                  <a:srgbClr val="166534"/>
+                  <a:srgbClr val="A5335F"/>
                 </a:solidFill>
                 <a:latin typeface="Verdana"/>
               </a:rPr>
@@ -12550,7 +12550,7 @@
             <a:r>
               <a:rPr sz="2100" b="1" i="0">
                 <a:solidFill>
-                  <a:srgbClr val="166534"/>
+                  <a:srgbClr val="A5335F"/>
                 </a:solidFill>
                 <a:latin typeface="Verdana"/>
               </a:rPr>
@@ -12674,7 +12674,7 @@
             <a:r>
               <a:rPr sz="2100" b="1" i="0">
                 <a:solidFill>
-                  <a:srgbClr val="166534"/>
+                  <a:srgbClr val="A5335F"/>
                 </a:solidFill>
                 <a:latin typeface="Verdana"/>
               </a:rPr>
@@ -12798,7 +12798,7 @@
             <a:r>
               <a:rPr sz="2100" b="1" i="0">
                 <a:solidFill>
-                  <a:srgbClr val="166534"/>
+                  <a:srgbClr val="A5335F"/>
                 </a:solidFill>
                 <a:latin typeface="Verdana"/>
               </a:rPr>
@@ -13014,7 +13014,7 @@
             <a:r>
               <a:rPr sz="1300" b="1" i="0" spc="156">
                 <a:solidFill>
-                  <a:srgbClr val="166534"/>
+                  <a:srgbClr val="A5335F"/>
                 </a:solidFill>
                 <a:latin typeface="Verdana"/>
               </a:rPr>
@@ -13040,7 +13040,7 @@
             </a:avLst>
           </a:prstGeom>
           <a:solidFill>
-            <a:srgbClr val="E3F1E7"/>
+            <a:srgbClr val="FCE9F0"/>
           </a:solidFill>
           <a:ln w="12700">
             <a:solidFill>
@@ -13361,7 +13361,7 @@
             <a:r>
               <a:rPr sz="1300" b="1" i="0" spc="156">
                 <a:solidFill>
-                  <a:srgbClr val="166534"/>
+                  <a:srgbClr val="A5335F"/>
                 </a:solidFill>
                 <a:latin typeface="Verdana"/>
               </a:rPr>
@@ -13602,7 +13602,7 @@
             <a:r>
               <a:rPr sz="1800" b="1" i="0">
                 <a:solidFill>
-                  <a:srgbClr val="166534"/>
+                  <a:srgbClr val="A5335F"/>
                 </a:solidFill>
                 <a:latin typeface="Verdana"/>
               </a:rPr>
@@ -13761,7 +13761,7 @@
             <a:r>
               <a:rPr sz="1800" b="1" i="0">
                 <a:solidFill>
-                  <a:srgbClr val="166534"/>
+                  <a:srgbClr val="A5335F"/>
                 </a:solidFill>
                 <a:latin typeface="Verdana"/>
               </a:rPr>
@@ -13920,7 +13920,7 @@
             <a:r>
               <a:rPr sz="1800" b="1" i="0">
                 <a:solidFill>
-                  <a:srgbClr val="166534"/>
+                  <a:srgbClr val="A5335F"/>
                 </a:solidFill>
                 <a:latin typeface="Verdana"/>
               </a:rPr>
@@ -14079,7 +14079,7 @@
             <a:r>
               <a:rPr sz="1800" b="1" i="0">
                 <a:solidFill>
-                  <a:srgbClr val="166534"/>
+                  <a:srgbClr val="A5335F"/>
                 </a:solidFill>
                 <a:latin typeface="Verdana"/>
               </a:rPr>
@@ -14419,7 +14419,7 @@
             <a:r>
               <a:rPr sz="1300" b="1" i="0" spc="156">
                 <a:solidFill>
-                  <a:srgbClr val="166534"/>
+                  <a:srgbClr val="A5335F"/>
                 </a:solidFill>
                 <a:latin typeface="Verdana"/>
               </a:rPr>
@@ -14660,7 +14660,7 @@
             <a:r>
               <a:rPr sz="1800" b="1" i="0">
                 <a:solidFill>
-                  <a:srgbClr val="166534"/>
+                  <a:srgbClr val="A5335F"/>
                 </a:solidFill>
                 <a:latin typeface="Verdana"/>
               </a:rPr>
@@ -14819,7 +14819,7 @@
             <a:r>
               <a:rPr sz="1800" b="1" i="0">
                 <a:solidFill>
-                  <a:srgbClr val="166534"/>
+                  <a:srgbClr val="A5335F"/>
                 </a:solidFill>
                 <a:latin typeface="Verdana"/>
               </a:rPr>
@@ -14978,7 +14978,7 @@
             <a:r>
               <a:rPr sz="1800" b="1" i="0">
                 <a:solidFill>
-                  <a:srgbClr val="166534"/>
+                  <a:srgbClr val="A5335F"/>
                 </a:solidFill>
                 <a:latin typeface="Verdana"/>
               </a:rPr>
@@ -15318,7 +15318,7 @@
             <a:r>
               <a:rPr sz="1300" b="1" i="0" spc="156">
                 <a:solidFill>
-                  <a:srgbClr val="166534"/>
+                  <a:srgbClr val="A5335F"/>
                 </a:solidFill>
                 <a:latin typeface="Verdana"/>
               </a:rPr>
@@ -15468,7 +15468,7 @@
             </a:avLst>
           </a:prstGeom>
           <a:solidFill>
-            <a:srgbClr val="E3F1E7"/>
+            <a:srgbClr val="FCE9F0"/>
           </a:solidFill>
           <a:ln>
             <a:noFill/>
@@ -15525,7 +15525,7 @@
             <a:r>
               <a:rPr sz="1500" b="1" i="0">
                 <a:solidFill>
-                  <a:srgbClr val="166534"/>
+                  <a:srgbClr val="A5335F"/>
                 </a:solidFill>
                 <a:latin typeface="Verdana"/>
               </a:rPr>
@@ -15636,7 +15636,7 @@
             </a:avLst>
           </a:prstGeom>
           <a:solidFill>
-            <a:srgbClr val="E3F1E7"/>
+            <a:srgbClr val="FCE9F0"/>
           </a:solidFill>
           <a:ln>
             <a:noFill/>
@@ -15693,7 +15693,7 @@
             <a:r>
               <a:rPr sz="1500" b="1" i="0">
                 <a:solidFill>
-                  <a:srgbClr val="166534"/>
+                  <a:srgbClr val="A5335F"/>
                 </a:solidFill>
                 <a:latin typeface="Verdana"/>
               </a:rPr>
@@ -15804,7 +15804,7 @@
             </a:avLst>
           </a:prstGeom>
           <a:solidFill>
-            <a:srgbClr val="E3F1E7"/>
+            <a:srgbClr val="FCE9F0"/>
           </a:solidFill>
           <a:ln>
             <a:noFill/>
@@ -15861,7 +15861,7 @@
             <a:r>
               <a:rPr sz="1500" b="1" i="0">
                 <a:solidFill>
-                  <a:srgbClr val="166534"/>
+                  <a:srgbClr val="A5335F"/>
                 </a:solidFill>
                 <a:latin typeface="Verdana"/>
               </a:rPr>
@@ -15972,7 +15972,7 @@
             </a:avLst>
           </a:prstGeom>
           <a:solidFill>
-            <a:srgbClr val="E3F1E7"/>
+            <a:srgbClr val="FCE9F0"/>
           </a:solidFill>
           <a:ln>
             <a:noFill/>
@@ -16029,7 +16029,7 @@
             <a:r>
               <a:rPr sz="1500" b="1" i="0">
                 <a:solidFill>
-                  <a:srgbClr val="166534"/>
+                  <a:srgbClr val="A5335F"/>
                 </a:solidFill>
                 <a:latin typeface="Verdana"/>
               </a:rPr>
@@ -16140,7 +16140,7 @@
             </a:avLst>
           </a:prstGeom>
           <a:solidFill>
-            <a:srgbClr val="E3F1E7"/>
+            <a:srgbClr val="FCE9F0"/>
           </a:solidFill>
           <a:ln>
             <a:noFill/>
@@ -16197,7 +16197,7 @@
             <a:r>
               <a:rPr sz="1500" b="1" i="0">
                 <a:solidFill>
-                  <a:srgbClr val="166534"/>
+                  <a:srgbClr val="A5335F"/>
                 </a:solidFill>
                 <a:latin typeface="Verdana"/>
               </a:rPr>
@@ -16308,7 +16308,7 @@
             </a:avLst>
           </a:prstGeom>
           <a:solidFill>
-            <a:srgbClr val="E3F1E7"/>
+            <a:srgbClr val="FCE9F0"/>
           </a:solidFill>
           <a:ln>
             <a:noFill/>
@@ -16365,7 +16365,7 @@
             <a:r>
               <a:rPr sz="1500" b="1" i="0">
                 <a:solidFill>
-                  <a:srgbClr val="166534"/>
+                  <a:srgbClr val="A5335F"/>
                 </a:solidFill>
                 <a:latin typeface="Verdana"/>
               </a:rPr>
@@ -16581,7 +16581,7 @@
             <a:r>
               <a:rPr sz="1300" b="1" i="0" spc="156">
                 <a:solidFill>
-                  <a:srgbClr val="166534"/>
+                  <a:srgbClr val="A5335F"/>
                 </a:solidFill>
                 <a:latin typeface="Verdana"/>
               </a:rPr>
@@ -16731,7 +16731,7 @@
             </a:avLst>
           </a:prstGeom>
           <a:solidFill>
-            <a:srgbClr val="E3F1E7"/>
+            <a:srgbClr val="FCE9F0"/>
           </a:solidFill>
           <a:ln>
             <a:noFill/>
@@ -16788,7 +16788,7 @@
             <a:r>
               <a:rPr sz="1500" b="1" i="0">
                 <a:solidFill>
-                  <a:srgbClr val="166534"/>
+                  <a:srgbClr val="A5335F"/>
                 </a:solidFill>
                 <a:latin typeface="Verdana"/>
               </a:rPr>
@@ -16908,7 +16908,7 @@
             </a:avLst>
           </a:prstGeom>
           <a:solidFill>
-            <a:srgbClr val="E3F1E7"/>
+            <a:srgbClr val="FCE9F0"/>
           </a:solidFill>
           <a:ln>
             <a:noFill/>
@@ -16965,7 +16965,7 @@
             <a:r>
               <a:rPr sz="1500" b="1" i="0">
                 <a:solidFill>
-                  <a:srgbClr val="166534"/>
+                  <a:srgbClr val="A5335F"/>
                 </a:solidFill>
                 <a:latin typeface="Verdana"/>
               </a:rPr>
@@ -17085,7 +17085,7 @@
             </a:avLst>
           </a:prstGeom>
           <a:solidFill>
-            <a:srgbClr val="E3F1E7"/>
+            <a:srgbClr val="FCE9F0"/>
           </a:solidFill>
           <a:ln>
             <a:noFill/>
@@ -17142,7 +17142,7 @@
             <a:r>
               <a:rPr sz="1500" b="1" i="0">
                 <a:solidFill>
-                  <a:srgbClr val="166534"/>
+                  <a:srgbClr val="A5335F"/>
                 </a:solidFill>
                 <a:latin typeface="Verdana"/>
               </a:rPr>
@@ -17262,7 +17262,7 @@
             </a:avLst>
           </a:prstGeom>
           <a:solidFill>
-            <a:srgbClr val="E3F1E7"/>
+            <a:srgbClr val="FCE9F0"/>
           </a:solidFill>
           <a:ln>
             <a:noFill/>
@@ -17319,7 +17319,7 @@
             <a:r>
               <a:rPr sz="1500" b="1" i="0">
                 <a:solidFill>
-                  <a:srgbClr val="166534"/>
+                  <a:srgbClr val="A5335F"/>
                 </a:solidFill>
                 <a:latin typeface="Verdana"/>
               </a:rPr>
@@ -17439,7 +17439,7 @@
             </a:avLst>
           </a:prstGeom>
           <a:solidFill>
-            <a:srgbClr val="E3F1E7"/>
+            <a:srgbClr val="FCE9F0"/>
           </a:solidFill>
           <a:ln>
             <a:noFill/>
@@ -17496,7 +17496,7 @@
             <a:r>
               <a:rPr sz="1500" b="1" i="0">
                 <a:solidFill>
-                  <a:srgbClr val="166534"/>
+                  <a:srgbClr val="A5335F"/>
                 </a:solidFill>
                 <a:latin typeface="Verdana"/>
               </a:rPr>
@@ -17616,7 +17616,7 @@
             </a:avLst>
           </a:prstGeom>
           <a:solidFill>
-            <a:srgbClr val="E3F1E7"/>
+            <a:srgbClr val="FCE9F0"/>
           </a:solidFill>
           <a:ln>
             <a:noFill/>
@@ -17673,7 +17673,7 @@
             <a:r>
               <a:rPr sz="1500" b="1" i="0">
                 <a:solidFill>
-                  <a:srgbClr val="166534"/>
+                  <a:srgbClr val="A5335F"/>
                 </a:solidFill>
                 <a:latin typeface="Verdana"/>
               </a:rPr>

--- a/assets/powerpoints/module-urgence/A4-la-trousse-de-premiers-soins.pptx
+++ b/assets/powerpoints/module-urgence/A4-la-trousse-de-premiers-soins.pptx
@@ -12306,7 +12306,7 @@
                 </a:solidFill>
                 <a:latin typeface="Verdana"/>
               </a:rPr>
-              <a:t>EN APPRENDRE PLUS</a:t>
+              <a:t>OUVRIR LA MINI-LEÇON</a:t>
             </a:r>
           </a:p>
         </p:txBody>
